--- a/ゲーム科1年/00_前期/ゲームプログラミングⅢ/ゲーム数学/座学/02_直線の傾き.pptx
+++ b/ゲーム科1年/00_前期/ゲームプログラミングⅢ/ゲーム数学/座学/02_直線の傾き.pptx
@@ -269,7 +269,7 @@
           <a:p>
             <a:fld id="{E9CC885B-4903-4D54-9A93-00025F12DED9}" type="datetimeFigureOut">
               <a:rPr kumimoji="1" lang="ja-JP" altLang="en-US" smtClean="0"/>
-              <a:t>2024/11/7</a:t>
+              <a:t>2025/6/10</a:t>
             </a:fld>
             <a:endParaRPr kumimoji="1" lang="ja-JP" altLang="en-US"/>
           </a:p>
@@ -499,7 +499,7 @@
           <a:p>
             <a:fld id="{E9CC885B-4903-4D54-9A93-00025F12DED9}" type="datetimeFigureOut">
               <a:rPr kumimoji="1" lang="ja-JP" altLang="en-US" smtClean="0"/>
-              <a:t>2024/11/7</a:t>
+              <a:t>2025/6/10</a:t>
             </a:fld>
             <a:endParaRPr kumimoji="1" lang="ja-JP" altLang="en-US"/>
           </a:p>
@@ -739,7 +739,7 @@
           <a:p>
             <a:fld id="{E9CC885B-4903-4D54-9A93-00025F12DED9}" type="datetimeFigureOut">
               <a:rPr kumimoji="1" lang="ja-JP" altLang="en-US" smtClean="0"/>
-              <a:t>2024/11/7</a:t>
+              <a:t>2025/6/10</a:t>
             </a:fld>
             <a:endParaRPr kumimoji="1" lang="ja-JP" altLang="en-US"/>
           </a:p>
@@ -969,7 +969,7 @@
           <a:p>
             <a:fld id="{E9CC885B-4903-4D54-9A93-00025F12DED9}" type="datetimeFigureOut">
               <a:rPr kumimoji="1" lang="ja-JP" altLang="en-US" smtClean="0"/>
-              <a:t>2024/11/7</a:t>
+              <a:t>2025/6/10</a:t>
             </a:fld>
             <a:endParaRPr kumimoji="1" lang="ja-JP" altLang="en-US"/>
           </a:p>
@@ -1244,7 +1244,7 @@
           <a:p>
             <a:fld id="{E9CC885B-4903-4D54-9A93-00025F12DED9}" type="datetimeFigureOut">
               <a:rPr kumimoji="1" lang="ja-JP" altLang="en-US" smtClean="0"/>
-              <a:t>2024/11/7</a:t>
+              <a:t>2025/6/10</a:t>
             </a:fld>
             <a:endParaRPr kumimoji="1" lang="ja-JP" altLang="en-US"/>
           </a:p>
@@ -1573,7 +1573,7 @@
           <a:p>
             <a:fld id="{E9CC885B-4903-4D54-9A93-00025F12DED9}" type="datetimeFigureOut">
               <a:rPr kumimoji="1" lang="ja-JP" altLang="en-US" smtClean="0"/>
-              <a:t>2024/11/7</a:t>
+              <a:t>2025/6/10</a:t>
             </a:fld>
             <a:endParaRPr kumimoji="1" lang="ja-JP" altLang="en-US"/>
           </a:p>
@@ -2049,7 +2049,7 @@
           <a:p>
             <a:fld id="{E9CC885B-4903-4D54-9A93-00025F12DED9}" type="datetimeFigureOut">
               <a:rPr kumimoji="1" lang="ja-JP" altLang="en-US" smtClean="0"/>
-              <a:t>2024/11/7</a:t>
+              <a:t>2025/6/10</a:t>
             </a:fld>
             <a:endParaRPr kumimoji="1" lang="ja-JP" altLang="en-US"/>
           </a:p>
@@ -2190,7 +2190,7 @@
           <a:p>
             <a:fld id="{E9CC885B-4903-4D54-9A93-00025F12DED9}" type="datetimeFigureOut">
               <a:rPr kumimoji="1" lang="ja-JP" altLang="en-US" smtClean="0"/>
-              <a:t>2024/11/7</a:t>
+              <a:t>2025/6/10</a:t>
             </a:fld>
             <a:endParaRPr kumimoji="1" lang="ja-JP" altLang="en-US"/>
           </a:p>
@@ -2303,7 +2303,7 @@
           <a:p>
             <a:fld id="{E9CC885B-4903-4D54-9A93-00025F12DED9}" type="datetimeFigureOut">
               <a:rPr kumimoji="1" lang="ja-JP" altLang="en-US" smtClean="0"/>
-              <a:t>2024/11/7</a:t>
+              <a:t>2025/6/10</a:t>
             </a:fld>
             <a:endParaRPr kumimoji="1" lang="ja-JP" altLang="en-US"/>
           </a:p>
@@ -2646,7 +2646,7 @@
           <a:p>
             <a:fld id="{E9CC885B-4903-4D54-9A93-00025F12DED9}" type="datetimeFigureOut">
               <a:rPr kumimoji="1" lang="ja-JP" altLang="en-US" smtClean="0"/>
-              <a:t>2024/11/7</a:t>
+              <a:t>2025/6/10</a:t>
             </a:fld>
             <a:endParaRPr kumimoji="1" lang="ja-JP" altLang="en-US"/>
           </a:p>
@@ -2934,7 +2934,7 @@
           <a:p>
             <a:fld id="{E9CC885B-4903-4D54-9A93-00025F12DED9}" type="datetimeFigureOut">
               <a:rPr kumimoji="1" lang="ja-JP" altLang="en-US" smtClean="0"/>
-              <a:t>2024/11/7</a:t>
+              <a:t>2025/6/10</a:t>
             </a:fld>
             <a:endParaRPr kumimoji="1" lang="ja-JP" altLang="en-US"/>
           </a:p>
@@ -3207,7 +3207,7 @@
           <a:p>
             <a:fld id="{E9CC885B-4903-4D54-9A93-00025F12DED9}" type="datetimeFigureOut">
               <a:rPr kumimoji="1" lang="ja-JP" altLang="en-US" smtClean="0"/>
-              <a:t>2024/11/7</a:t>
+              <a:t>2025/6/10</a:t>
             </a:fld>
             <a:endParaRPr kumimoji="1" lang="ja-JP" altLang="en-US"/>
           </a:p>
@@ -6521,6 +6521,60 @@
           <a:chExt cx="0" cy="0"/>
         </a:xfrm>
       </p:grpSpPr>
+      <p:sp>
+        <p:nvSpPr>
+          <p:cNvPr id="5" name="四角形: 角を丸くする 4">
+            <a:extLst>
+              <a:ext uri="{FF2B5EF4-FFF2-40B4-BE49-F238E27FC236}">
+                <a16:creationId xmlns:a16="http://schemas.microsoft.com/office/drawing/2014/main" id="{3968790D-768D-48E3-82E6-279343CA021C}"/>
+              </a:ext>
+            </a:extLst>
+          </p:cNvPr>
+          <p:cNvSpPr/>
+          <p:nvPr/>
+        </p:nvSpPr>
+        <p:spPr>
+          <a:xfrm>
+            <a:off x="338390" y="1754063"/>
+            <a:ext cx="9542210" cy="3952470"/>
+          </a:xfrm>
+          <a:prstGeom prst="roundRect">
+            <a:avLst/>
+          </a:prstGeom>
+          <a:solidFill>
+            <a:schemeClr val="bg1">
+              <a:lumMod val="85000"/>
+            </a:schemeClr>
+          </a:solidFill>
+          <a:ln>
+            <a:noFill/>
+          </a:ln>
+        </p:spPr>
+        <p:style>
+          <a:lnRef idx="2">
+            <a:schemeClr val="accent1">
+              <a:shade val="50000"/>
+            </a:schemeClr>
+          </a:lnRef>
+          <a:fillRef idx="1">
+            <a:schemeClr val="accent1"/>
+          </a:fillRef>
+          <a:effectRef idx="0">
+            <a:schemeClr val="accent1"/>
+          </a:effectRef>
+          <a:fontRef idx="minor">
+            <a:schemeClr val="lt1"/>
+          </a:fontRef>
+        </p:style>
+        <p:txBody>
+          <a:bodyPr rtlCol="0" anchor="ctr"/>
+          <a:lstStyle/>
+          <a:p>
+            <a:pPr algn="ctr"/>
+            <a:endParaRPr kumimoji="1" lang="ja-JP" altLang="en-US"/>
+          </a:p>
+        </p:txBody>
+      </p:sp>
       <p:sp>
         <p:nvSpPr>
           <p:cNvPr id="4" name="テキスト ボックス 3">
@@ -7254,8 +7308,8 @@
           </a:p>
         </p:txBody>
       </p:sp>
-      <mc:AlternateContent xmlns:mc="http://schemas.openxmlformats.org/markup-compatibility/2006" xmlns:a14="http://schemas.microsoft.com/office/drawing/2010/main">
-        <mc:Choice Requires="a14">
+      <mc:AlternateContent xmlns:mc="http://schemas.openxmlformats.org/markup-compatibility/2006">
+        <mc:Choice xmlns:a14="http://schemas.microsoft.com/office/drawing/2010/main" Requires="a14">
           <p:sp>
             <p:nvSpPr>
               <p:cNvPr id="6" name="テキスト ボックス 5">
@@ -7347,10 +7401,18 @@
               </a:p>
               <a:p>
                 <a:r>
-                  <a:rPr kumimoji="1" lang="ja-JP" altLang="en-US" sz="2400" dirty="0"/>
+                  <a:rPr kumimoji="1" lang="ja-JP" altLang="en-US" sz="2400" b="1" dirty="0">
+                    <a:solidFill>
+                      <a:srgbClr val="FF0000"/>
+                    </a:solidFill>
+                  </a:rPr>
                   <a:t>■解答</a:t>
                 </a:r>
-                <a:endParaRPr kumimoji="1" lang="en-US" altLang="ja-JP" sz="2400" dirty="0"/>
+                <a:endParaRPr kumimoji="1" lang="en-US" altLang="ja-JP" sz="2400" b="1" dirty="0">
+                  <a:solidFill>
+                    <a:srgbClr val="FF0000"/>
+                  </a:solidFill>
+                </a:endParaRPr>
               </a:p>
               <a:p>
                 <a:pPr>
@@ -7735,7 +7797,7 @@
             </p:txBody>
           </p:sp>
         </mc:Choice>
-        <mc:Fallback xmlns="">
+        <mc:Fallback>
           <p:sp>
             <p:nvSpPr>
               <p:cNvPr id="6" name="テキスト ボックス 5">
@@ -7810,6 +7872,60 @@
           <a:chExt cx="0" cy="0"/>
         </a:xfrm>
       </p:grpSpPr>
+      <p:sp>
+        <p:nvSpPr>
+          <p:cNvPr id="5" name="四角形: 角を丸くする 4">
+            <a:extLst>
+              <a:ext uri="{FF2B5EF4-FFF2-40B4-BE49-F238E27FC236}">
+                <a16:creationId xmlns:a16="http://schemas.microsoft.com/office/drawing/2014/main" id="{E9075708-E788-4750-B2BB-3F18F5316EA4}"/>
+              </a:ext>
+            </a:extLst>
+          </p:cNvPr>
+          <p:cNvSpPr/>
+          <p:nvPr/>
+        </p:nvSpPr>
+        <p:spPr>
+          <a:xfrm>
+            <a:off x="338390" y="1754063"/>
+            <a:ext cx="9542210" cy="2293004"/>
+          </a:xfrm>
+          <a:prstGeom prst="roundRect">
+            <a:avLst/>
+          </a:prstGeom>
+          <a:solidFill>
+            <a:schemeClr val="bg1">
+              <a:lumMod val="85000"/>
+            </a:schemeClr>
+          </a:solidFill>
+          <a:ln>
+            <a:noFill/>
+          </a:ln>
+        </p:spPr>
+        <p:style>
+          <a:lnRef idx="2">
+            <a:schemeClr val="accent1">
+              <a:shade val="50000"/>
+            </a:schemeClr>
+          </a:lnRef>
+          <a:fillRef idx="1">
+            <a:schemeClr val="accent1"/>
+          </a:fillRef>
+          <a:effectRef idx="0">
+            <a:schemeClr val="accent1"/>
+          </a:effectRef>
+          <a:fontRef idx="minor">
+            <a:schemeClr val="lt1"/>
+          </a:fontRef>
+        </p:style>
+        <p:txBody>
+          <a:bodyPr rtlCol="0" anchor="ctr"/>
+          <a:lstStyle/>
+          <a:p>
+            <a:pPr algn="ctr"/>
+            <a:endParaRPr kumimoji="1" lang="ja-JP" altLang="en-US"/>
+          </a:p>
+        </p:txBody>
+      </p:sp>
       <p:sp>
         <p:nvSpPr>
           <p:cNvPr id="4" name="テキスト ボックス 3">
@@ -8151,8 +8267,8 @@
           </a:p>
         </p:txBody>
       </p:sp>
-      <mc:AlternateContent xmlns:mc="http://schemas.openxmlformats.org/markup-compatibility/2006" xmlns:a14="http://schemas.microsoft.com/office/drawing/2010/main">
-        <mc:Choice Requires="a14">
+      <mc:AlternateContent xmlns:mc="http://schemas.openxmlformats.org/markup-compatibility/2006">
+        <mc:Choice xmlns:a14="http://schemas.microsoft.com/office/drawing/2010/main" Requires="a14">
           <p:sp>
             <p:nvSpPr>
               <p:cNvPr id="6" name="テキスト ボックス 5">
@@ -8247,10 +8363,18 @@
               </a:p>
               <a:p>
                 <a:r>
-                  <a:rPr lang="ja-JP" altLang="en-US" sz="2400" dirty="0"/>
+                  <a:rPr lang="ja-JP" altLang="en-US" sz="2400" b="1" dirty="0">
+                    <a:solidFill>
+                      <a:srgbClr val="FF0000"/>
+                    </a:solidFill>
+                  </a:rPr>
                   <a:t>■解答</a:t>
                 </a:r>
-                <a:endParaRPr lang="en-US" altLang="ja-JP" sz="2400" dirty="0"/>
+                <a:endParaRPr lang="en-US" altLang="ja-JP" sz="2400" b="1" dirty="0">
+                  <a:solidFill>
+                    <a:srgbClr val="FF0000"/>
+                  </a:solidFill>
+                </a:endParaRPr>
               </a:p>
               <a:p>
                 <a:r>
@@ -8349,7 +8473,7 @@
             </p:txBody>
           </p:sp>
         </mc:Choice>
-        <mc:Fallback xmlns="">
+        <mc:Fallback>
           <p:sp>
             <p:nvSpPr>
               <p:cNvPr id="6" name="テキスト ボックス 5">
@@ -8463,8 +8587,8 @@
           </a:p>
         </p:txBody>
       </p:sp>
-      <mc:AlternateContent xmlns:mc="http://schemas.openxmlformats.org/markup-compatibility/2006" xmlns:a14="http://schemas.microsoft.com/office/drawing/2010/main">
-        <mc:Choice Requires="a14">
+      <mc:AlternateContent xmlns:mc="http://schemas.openxmlformats.org/markup-compatibility/2006">
+        <mc:Choice xmlns:a14="http://schemas.microsoft.com/office/drawing/2010/main" Requires="a14">
           <p:sp>
             <p:nvSpPr>
               <p:cNvPr id="6" name="テキスト ボックス 5">
@@ -8559,10 +8683,18 @@
               </a:p>
               <a:p>
                 <a:r>
-                  <a:rPr lang="ja-JP" altLang="en-US" sz="2400" dirty="0"/>
-                  <a:t>■解答つづき</a:t>
+                  <a:rPr lang="ja-JP" altLang="en-US" sz="2400" b="1" dirty="0">
+                    <a:solidFill>
+                      <a:srgbClr val="FF0000"/>
+                    </a:solidFill>
+                  </a:rPr>
+                  <a:t>■解答</a:t>
                 </a:r>
-                <a:endParaRPr lang="en-US" altLang="ja-JP" sz="2400" dirty="0"/>
+                <a:endParaRPr lang="en-US" altLang="ja-JP" sz="2400" b="1" dirty="0">
+                  <a:solidFill>
+                    <a:srgbClr val="FF0000"/>
+                  </a:solidFill>
+                </a:endParaRPr>
               </a:p>
               <a:p>
                 <a14:m>
@@ -8788,7 +8920,7 @@
             </p:txBody>
           </p:sp>
         </mc:Choice>
-        <mc:Fallback xmlns="">
+        <mc:Fallback>
           <p:sp>
             <p:nvSpPr>
               <p:cNvPr id="6" name="テキスト ボックス 5">
@@ -8902,8 +9034,8 @@
           </a:p>
         </p:txBody>
       </p:sp>
-      <mc:AlternateContent xmlns:mc="http://schemas.openxmlformats.org/markup-compatibility/2006" xmlns:a14="http://schemas.microsoft.com/office/drawing/2010/main">
-        <mc:Choice Requires="a14">
+      <mc:AlternateContent xmlns:mc="http://schemas.openxmlformats.org/markup-compatibility/2006">
+        <mc:Choice xmlns:a14="http://schemas.microsoft.com/office/drawing/2010/main" Requires="a14">
           <p:sp>
             <p:nvSpPr>
               <p:cNvPr id="6" name="テキスト ボックス 5">
@@ -8998,10 +9130,18 @@
               </a:p>
               <a:p>
                 <a:r>
-                  <a:rPr lang="ja-JP" altLang="en-US" sz="2400" dirty="0"/>
-                  <a:t>■解答つづき</a:t>
+                  <a:rPr lang="ja-JP" altLang="en-US" sz="2400" b="1" dirty="0">
+                    <a:solidFill>
+                      <a:srgbClr val="FF0000"/>
+                    </a:solidFill>
+                  </a:rPr>
+                  <a:t>■解答</a:t>
                 </a:r>
-                <a:endParaRPr lang="en-US" altLang="ja-JP" sz="2400" dirty="0"/>
+                <a:endParaRPr lang="en-US" altLang="ja-JP" sz="2400" b="1" dirty="0">
+                  <a:solidFill>
+                    <a:srgbClr val="FF0000"/>
+                  </a:solidFill>
+                </a:endParaRPr>
               </a:p>
               <a:p>
                 <a14:m>
@@ -9122,7 +9262,7 @@
             </p:txBody>
           </p:sp>
         </mc:Choice>
-        <mc:Fallback xmlns="">
+        <mc:Fallback>
           <p:sp>
             <p:nvSpPr>
               <p:cNvPr id="6" name="テキスト ボックス 5">
